--- a/docs/ReFind-final-presentation.video-only.pptx
+++ b/docs/ReFind-final-presentation.video-only.pptx
@@ -1997,8 +1997,8 @@
               <a:rPr lang="en-US" dirty="0"/>
               <a:t>[6:20–7:05 · 45초]
 구조는 단순합니다. 사용자는 CloudFront로 접속하고, EC2의 Docker에서 Next.js와 FastAPI, PostgreSQL, 매일 수집 크론이 돌며 LOST112 데이터를 가져옵니다.
-현재 구현된 것은 왼쪽 카드입니다. 등록, TOP 5와 근거, 매일 재매칭과 알림이고, 화면은 흑백 분실물 태그 콘셉트로 통일해 라이트·다크 테마와 모바일 우선, 접근성을 반영했습니다. 자동 테스트 23개와 자동 배포도 갖췄습니다.
-가운데는 남은 보강 과제입니다. 가중치의 실데이터 검증, 입력 누락 시 안정성, 알림 과다 방지입니다. 중고거래 연동은 API를 검토 중이라 현재 범위에서 제외했습니다.</a:t>
+현재 구현된 것은 왼쪽 카드입니다. 등록, TOP 5와 항목별 근거, 비교한 항목 수 표시, 경찰민원24·지도 링크, 하루 3건 알림 상한이고, 화면은 흑백 분실물 태그 콘셉트로 통일해 라이트·다크 테마와 모바일 우선, 접근성을 반영했습니다. 자동 테스트와 자동 배포도 갖췄습니다.
+가운데는 남은 과제로, 가중치와 이번에 고친 알림 상한·색상 표기의 실데이터 검증, 입력 누락 시 점수 안정성입니다. 습득물 단건 링크는 경찰민원24에 공개된 주소가 없어 검색 링크로 대신했습니다. 중고거래 연동은 API를 검토 중이라 현재 범위에서 제외했습니다.</a:t>
             </a:r>
             <a:endParaRPr lang="en-US" dirty="0"/>
           </a:p>
@@ -2542,9 +2542,9 @@
               <a:rPr lang="en-US" dirty="0"/>
               <a:t>[2:05–3:10 · 약 65초 — 영상 재생]
 지금부터 시연 영상을 보시겠습니다.
-(슬라이드의 영상을 클릭해 재생합니다. 가입 → 분실물 등록 4단계 → TOP 5 → 후보 상세 → 알림 순서이고 약 1분 2초입니다.)
-포인트 세 가지만 짚겠습니다. 첫째, 등록은 이름과 특징, 날짜, 지역만으로 끝납니다. 둘째, 후보마다 점수와 이유가 함께 나옵니다. 셋째, 새 습득물이 생기면 알림으로 먼저 알려 줍니다.
-(운영 서비스에서 시연 계정으로 녹화했고, 분실 날짜를 2주 전으로 등록해 이미 보관 중인 습득물이 후보로 나온 장면입니다. 알림이 많이 쌓여 보이면 "흔한 물건이라 후보가 많았고, 알림 과다 방지는 보강 과제"라고 짧게 말하세요.)</a:t>
+(슬라이드의 영상을 클릭해 재생합니다. 가입 → 분실물 등록 4단계 → TOP 5 → 후보 상세 → 알림 순서이고 약 1분 1초입니다.)
+포인트 세 가지만 짚겠습니다. 첫째, 등록은 이름과 특징, 날짜, 지역만으로 끝납니다. 둘째, 후보마다 점수와 이유, 6개 중 몇 개 항목을 비교했는지가 함께 나오고, 경찰민원24 검색과 보관 장소 지도로 바로 이어집니다. 셋째, 알림은 점수 높은 순으로 분실물당 하루 최대 3건만 갑니다.
+(운영 서비스에서 새 시연 계정으로 녹화했고, 분실 날짜를 2주 전으로 등록해 이미 보관 중인 습득물이 후보로 나온 장면입니다. 알림이 3건인 것은 하루 상한이 적용된 결과입니다.)</a:t>
             </a:r>
             <a:endParaRPr lang="en-US" dirty="0"/>
           </a:p>
@@ -2817,7 +2817,7 @@
               <a:t>[4:25–5:15 · 50초]
 그렇다면 가중치가 왜 이 값인지, 입력이 비면 점수가 흔들리지 않는지 실제로 돌려봤습니다.
 왼쪽입니다. 가중치를 절반이나 두 배로 바꿔도 TOP 5 적중률은 94에서 99% 사이였고, 모든 항목을 같은 비중으로 두면 1위 적중이 76.7%에서 41.1%로 떨어졌습니다. 지금 설정은 합리적인 범위입니다.
-오른쪽은 한계입니다. 상세 장소나 설명을 비워도 92.8%를 유지하지만, 색상을 비우면 71.7%로 떨어집니다. 입력이 줄면 점수의 의미가 달라지므로 정보 충족도를 함께 보여 주는 보강이 필요합니다.
+오른쪽은 한계입니다. 상세 장소나 설명을 비워도 92.8%를 유지하지만, 색상을 비우면 71.7%로 떨어집니다. 입력이 줄면 점수의 의미가 달라지므로, 후보 카드에 6개 중 몇 개 항목을 비교했는지를 함께 보여 주도록 서비스를 보완했습니다.
 (이 검증셋은 자체 제작이고 날짜·장소를 일부러 변별력 없게 둔 엄격한 조건입니다. 실데이터 검증은 앞으로의 과제입니다.)</a:t>
             </a:r>
             <a:endParaRPr lang="en-US" dirty="0"/>
@@ -2908,7 +2908,7 @@
               <a:rPr lang="en-US" dirty="0"/>
               <a:t>[5:15–5:50 · 35초]
 세 번째는 엉뚱한 후보를 걸러내는 일입니다. 개선 전에는 조선대에서 잃어버린 카드지갑에 대전, 제주, 부산 경찰서의 습득물이 나왔습니다. 경찰서 이름에서 지역을 잘못 뽑았기 때문입니다.
-지금은 코드처럼 종류, 날짜 범위, 시·도, 거리 조건을 모두 통과한 습득물만 점수를 계산합니다. 알림은 0.78점 이상일 때만, 같은 매칭은 한 번만 보내고, 매일 새벽 4시에 수집해서 다시 매칭합니다.</a:t>
+지금은 코드처럼 종류, 날짜 범위, 시·도, 거리 조건을 모두 통과한 습득물만 점수를 계산합니다. 알림은 0.78점 이상일 때만, 같은 매칭은 한 번만, 분실물 하나당 하루 최대 3건을 점수 높은 순으로 보냅니다. 나머지는 후보 화면에서 확인하고, 매일 새벽 4시에 수집해서 다시 매칭합니다.</a:t>
             </a:r>
             <a:endParaRPr lang="en-US" dirty="0"/>
           </a:p>
@@ -6175,7 +6175,7 @@
                   <a:schemeClr val="bg1"/>
                 </a:solidFill>
               </a:rPr>
-              <a:t>4단계 분실물 등록</a:t>
+              <a:t>4단계 등록 · TOP 5 · 항목별 근거</a:t>
             </a:r>
             <a:endParaRPr lang="en-US" sz="1400" dirty="0"/>
           </a:p>
@@ -6193,7 +6193,7 @@
                   <a:schemeClr val="bg1"/>
                 </a:solidFill>
               </a:rPr>
-              <a:t>TOP 5 후보와 항목별 근거</a:t>
+              <a:t>비교 항목 수 · 경찰민원24·지도 링크</a:t>
             </a:r>
             <a:endParaRPr lang="en-US" sz="1400" dirty="0"/>
           </a:p>
@@ -6211,7 +6211,7 @@
                   <a:schemeClr val="bg1"/>
                 </a:solidFill>
               </a:rPr>
-              <a:t>매일 04:00 수집 · 재매칭 · 알림</a:t>
+              <a:t>매일 재매칭 · 알림 (일 3건 상한)</a:t>
             </a:r>
             <a:endParaRPr lang="en-US" sz="1400" dirty="0"/>
           </a:p>
@@ -6247,7 +6247,7 @@
                   <a:schemeClr val="bg1"/>
                 </a:solidFill>
               </a:rPr>
-              <a:t>테스트 23개 · 자동 배포</a:t>
+              <a:t>자동 테스트 · 자동 배포</a:t>
             </a:r>
             <a:endParaRPr lang="en-US" sz="1400" dirty="0"/>
           </a:p>
@@ -6541,7 +6541,7 @@
                   <a:schemeClr val="tx1"/>
                 </a:solidFill>
               </a:rPr>
-              <a:t>입력 누락 시 안정성 (색상 비움 71.7%)</a:t>
+              <a:t>입력 누락 시 점수 안정성 (색상 비움 71.7%)</a:t>
             </a:r>
             <a:endParaRPr lang="en-US" sz="1300" dirty="0"/>
           </a:p>
@@ -6559,7 +6559,7 @@
                   <a:schemeClr val="tx1"/>
                 </a:solidFill>
               </a:rPr>
-              <a:t>흔한 물건의 알림 과다 방지</a:t>
+              <a:t>개선 항목(알림 상한·색상 표기)의 실데이터 검증</a:t>
             </a:r>
             <a:endParaRPr lang="en-US" sz="1300" dirty="0"/>
           </a:p>
@@ -6577,7 +6577,7 @@
                   <a:schemeClr val="tx1"/>
                 </a:solidFill>
               </a:rPr>
-              <a:t>후보 카드에서 원본 게시처 링크 연결</a:t>
+              <a:t>습득물 단건 링크는 경찰민원24 검색으로 대체</a:t>
             </a:r>
             <a:endParaRPr lang="en-US" sz="1300" dirty="0"/>
           </a:p>
@@ -13608,7 +13608,7 @@
                   <a:schemeClr val="accent6"/>
                 </a:solidFill>
               </a:rPr>
-              <a:t>새 습득물 0.78점 이상</a:t>
+              <a:t>0.78점 이상 · 일 3건 상한</a:t>
             </a:r>
             <a:endParaRPr lang="en-US" sz="1200" dirty="0"/>
           </a:p>
@@ -19407,7 +19407,7 @@
                   <a:schemeClr val="accent6"/>
                 </a:solidFill>
               </a:rPr>
-              <a:t>색상을 비우면 71.7%로 하락 → 정보 충족도 보강 필요</a:t>
+              <a:t>색상을 비우면 71.7%로 하락 → 화면에 '6개 중 N개 항목 비교됨' 표시로 보완</a:t>
             </a:r>
             <a:endParaRPr lang="en-US" sz="1500" dirty="0"/>
           </a:p>
@@ -22827,7 +22827,7 @@
                   <a:schemeClr val="tx1"/>
                 </a:solidFill>
               </a:rPr>
-              <a:t>같은 매칭은 한 번만 발송</a:t>
+              <a:t>같은 매칭 1회 · 하루 최대 3건</a:t>
             </a:r>
             <a:endParaRPr lang="en-US" sz="1200" dirty="0"/>
           </a:p>
